--- a/examples/results-prenormalized/report.pptx
+++ b/examples/results-prenormalized/report.pptx
@@ -23,6 +23,9 @@
     <p:sldId id="265" r:id="rId17"/>
     <p:sldId id="266" r:id="rId18"/>
     <p:sldId id="267" r:id="rId19"/>
+    <p:sldId id="268" r:id="rId20"/>
+    <p:sldId id="269" r:id="rId21"/>
+    <p:sldId id="270" r:id="rId22"/>
   </p:sldIdLst>
   <p:sldSz cx="9144000" cy="6858000" type="screen4x3"/>
   <p:notesSz cx="6858000" cy="9144000"/>
@@ -1899,63 +1902,9 @@
           </a:p>
         </p:txBody>
       </p:sp>
-      <p:sp>
-        <p:nvSpPr>
-          <p:cNvPr id="3" name="Text Placeholder 4"/>
-          <p:cNvSpPr>
-            <a:spLocks noGrp="1"/>
-          </p:cNvSpPr>
-          <p:nvPr>
-            <p:ph type="body" sz="quarter" idx="3"/>
-          </p:nvPr>
-        </p:nvSpPr>
-        <p:spPr>
-          <a:xfrm>
-            <a:off x="4645025" y="782905"/>
-            <a:ext cx="4041775" cy="639762"/>
-          </a:xfrm>
-        </p:spPr>
-        <p:txBody>
-          <a:bodyPr/>
-          <a:lstStyle/>
-          <a:p>
-            <a:r>
-              <a:rPr/>
-              <a:t>Differential fdr&lt;0.25</a:t>
-            </a:r>
-          </a:p>
-        </p:txBody>
-      </p:sp>
-      <p:sp>
-        <p:nvSpPr>
-          <p:cNvPr id="4" name="Text Placeholder 2"/>
-          <p:cNvSpPr>
-            <a:spLocks noGrp="1"/>
-          </p:cNvSpPr>
-          <p:nvPr>
-            <p:ph type="body" idx="1"/>
-          </p:nvPr>
-        </p:nvSpPr>
-        <p:spPr>
-          <a:xfrm>
-            <a:off x="457200" y="776118"/>
-            <a:ext cx="4040188" cy="639762"/>
-          </a:xfrm>
-        </p:spPr>
-        <p:txBody>
-          <a:bodyPr/>
-          <a:lstStyle/>
-          <a:p>
-            <a:r>
-              <a:rPr/>
-              <a:t>Complete Set fdr=1</a:t>
-            </a:r>
-          </a:p>
-        </p:txBody>
-      </p:sp>
       <p:pic>
         <p:nvPicPr>
-          <p:cNvPr id="5" name="" descr=""/>
+          <p:cNvPr id="3" name="" descr=""/>
           <p:cNvPicPr>
             <a:picLocks noGrp="1"/>
           </p:cNvPicPr>
@@ -1971,34 +1920,8 @@
         </p:blipFill>
         <p:spPr>
           <a:xfrm>
-            <a:off x="4645152" y="1426464"/>
-            <a:ext cx="4114800" cy="5440680"/>
-          </a:xfrm>
-          <a:prstGeom prst="rect">
-            <a:avLst/>
-          </a:prstGeom>
-        </p:spPr>
-      </p:pic>
-      <p:pic>
-        <p:nvPicPr>
-          <p:cNvPr id="6" name="" descr=""/>
-          <p:cNvPicPr>
-            <a:picLocks noGrp="1"/>
-          </p:cNvPicPr>
-          <p:nvPr>
-            <p:ph/>
-          </p:nvPr>
-        </p:nvPicPr>
-        <p:blipFill>
-          <a:blip cstate="print" r:embed="rId3"/>
-          <a:stretch>
-            <a:fillRect/>
-          </a:stretch>
-        </p:blipFill>
-        <p:spPr>
-          <a:xfrm>
-            <a:off x="457200" y="1426464"/>
-            <a:ext cx="4114800" cy="5440680"/>
+            <a:off x="457200" y="914400"/>
+            <a:ext cx="4572000" cy="4572000"/>
           </a:xfrm>
           <a:prstGeom prst="rect">
             <a:avLst/>
@@ -2057,63 +1980,9 @@
           </a:p>
         </p:txBody>
       </p:sp>
-      <p:sp>
-        <p:nvSpPr>
-          <p:cNvPr id="3" name="Text Placeholder 4"/>
-          <p:cNvSpPr>
-            <a:spLocks noGrp="1"/>
-          </p:cNvSpPr>
-          <p:nvPr>
-            <p:ph type="body" sz="quarter" idx="3"/>
-          </p:nvPr>
-        </p:nvSpPr>
-        <p:spPr>
-          <a:xfrm>
-            <a:off x="4645025" y="782905"/>
-            <a:ext cx="4041775" cy="639762"/>
-          </a:xfrm>
-        </p:spPr>
-        <p:txBody>
-          <a:bodyPr/>
-          <a:lstStyle/>
-          <a:p>
-            <a:r>
-              <a:rPr/>
-              <a:t>Differential fdr&lt;0.25</a:t>
-            </a:r>
-          </a:p>
-        </p:txBody>
-      </p:sp>
-      <p:sp>
-        <p:nvSpPr>
-          <p:cNvPr id="4" name="Text Placeholder 2"/>
-          <p:cNvSpPr>
-            <a:spLocks noGrp="1"/>
-          </p:cNvSpPr>
-          <p:nvPr>
-            <p:ph type="body" idx="1"/>
-          </p:nvPr>
-        </p:nvSpPr>
-        <p:spPr>
-          <a:xfrm>
-            <a:off x="457200" y="776118"/>
-            <a:ext cx="4040188" cy="639762"/>
-          </a:xfrm>
-        </p:spPr>
-        <p:txBody>
-          <a:bodyPr/>
-          <a:lstStyle/>
-          <a:p>
-            <a:r>
-              <a:rPr/>
-              <a:t>Complete Set fdr=1</a:t>
-            </a:r>
-          </a:p>
-        </p:txBody>
-      </p:sp>
       <p:pic>
         <p:nvPicPr>
-          <p:cNvPr id="5" name="" descr=""/>
+          <p:cNvPr id="3" name="" descr=""/>
           <p:cNvPicPr>
             <a:picLocks noGrp="1"/>
           </p:cNvPicPr>
@@ -2129,8 +1998,8 @@
         </p:blipFill>
         <p:spPr>
           <a:xfrm>
-            <a:off x="457200" y="1426464"/>
-            <a:ext cx="4114800" cy="5440680"/>
+            <a:off x="457200" y="914400"/>
+            <a:ext cx="4572000" cy="4572000"/>
           </a:xfrm>
           <a:prstGeom prst="rect">
             <a:avLst/>
@@ -2184,6 +2053,454 @@
           <a:p>
             <a:r>
               <a:rPr/>
+              <a:t>Comparison HFD-Dam_over_RD-Dam</a:t>
+            </a:r>
+          </a:p>
+        </p:txBody>
+      </p:sp>
+      <p:sp>
+        <p:nvSpPr>
+          <p:cNvPr id="3" name="Text Placeholder 4"/>
+          <p:cNvSpPr>
+            <a:spLocks noGrp="1"/>
+          </p:cNvSpPr>
+          <p:nvPr>
+            <p:ph type="body" sz="quarter" idx="3"/>
+          </p:nvPr>
+        </p:nvSpPr>
+        <p:spPr>
+          <a:xfrm>
+            <a:off x="4645025" y="782905"/>
+            <a:ext cx="4041775" cy="639762"/>
+          </a:xfrm>
+        </p:spPr>
+        <p:txBody>
+          <a:bodyPr/>
+          <a:lstStyle/>
+          <a:p>
+            <a:r>
+              <a:rPr/>
+              <a:t>Differential fdr&lt;0.25</a:t>
+            </a:r>
+          </a:p>
+        </p:txBody>
+      </p:sp>
+      <p:sp>
+        <p:nvSpPr>
+          <p:cNvPr id="4" name="Text Placeholder 2"/>
+          <p:cNvSpPr>
+            <a:spLocks noGrp="1"/>
+          </p:cNvSpPr>
+          <p:nvPr>
+            <p:ph type="body" idx="1"/>
+          </p:nvPr>
+        </p:nvSpPr>
+        <p:spPr>
+          <a:xfrm>
+            <a:off x="457200" y="776118"/>
+            <a:ext cx="4040188" cy="639762"/>
+          </a:xfrm>
+        </p:spPr>
+        <p:txBody>
+          <a:bodyPr/>
+          <a:lstStyle/>
+          <a:p>
+            <a:r>
+              <a:rPr/>
+              <a:t>Complete Set fdr=1</a:t>
+            </a:r>
+          </a:p>
+        </p:txBody>
+      </p:sp>
+      <p:pic>
+        <p:nvPicPr>
+          <p:cNvPr id="5" name="" descr=""/>
+          <p:cNvPicPr>
+            <a:picLocks noGrp="1"/>
+          </p:cNvPicPr>
+          <p:nvPr>
+            <p:ph/>
+          </p:nvPr>
+        </p:nvPicPr>
+        <p:blipFill>
+          <a:blip cstate="print" r:embed="rId2"/>
+          <a:stretch>
+            <a:fillRect/>
+          </a:stretch>
+        </p:blipFill>
+        <p:spPr>
+          <a:xfrm>
+            <a:off x="4645152" y="1426464"/>
+            <a:ext cx="4114800" cy="5440680"/>
+          </a:xfrm>
+          <a:prstGeom prst="rect">
+            <a:avLst/>
+          </a:prstGeom>
+        </p:spPr>
+      </p:pic>
+      <p:pic>
+        <p:nvPicPr>
+          <p:cNvPr id="6" name="" descr=""/>
+          <p:cNvPicPr>
+            <a:picLocks noGrp="1"/>
+          </p:cNvPicPr>
+          <p:nvPr>
+            <p:ph/>
+          </p:nvPr>
+        </p:nvPicPr>
+        <p:blipFill>
+          <a:blip cstate="print" r:embed="rId3"/>
+          <a:stretch>
+            <a:fillRect/>
+          </a:stretch>
+        </p:blipFill>
+        <p:spPr>
+          <a:xfrm>
+            <a:off x="457200" y="1426464"/>
+            <a:ext cx="4114800" cy="5440680"/>
+          </a:xfrm>
+          <a:prstGeom prst="rect">
+            <a:avLst/>
+          </a:prstGeom>
+        </p:spPr>
+      </p:pic>
+    </p:spTree>
+  </p:cSld>
+  <p:clrMapOvr>
+    <a:masterClrMapping/>
+  </p:clrMapOvr>
+</p:sld>
+</file>
+
+<file path=ppt/slides/slide13.xml><?xml version="1.0" encoding="utf-8"?>
+<p:sld xmlns:a="http://schemas.openxmlformats.org/drawingml/2006/main" xmlns:r="http://schemas.openxmlformats.org/officeDocument/2006/relationships" xmlns:p="http://schemas.openxmlformats.org/presentationml/2006/main">
+  <p:cSld>
+    <p:spTree>
+      <p:nvGrpSpPr>
+        <p:cNvPr id="1" name=""/>
+        <p:cNvGrpSpPr/>
+        <p:nvPr/>
+      </p:nvGrpSpPr>
+      <p:grpSpPr>
+        <a:xfrm>
+          <a:off x="0" y="0"/>
+          <a:ext cx="0" cy="0"/>
+          <a:chOff x="0" y="0"/>
+          <a:chExt cx="0" cy="0"/>
+        </a:xfrm>
+      </p:grpSpPr>
+      <p:sp>
+        <p:nvSpPr>
+          <p:cNvPr id="2" name="Title 1"/>
+          <p:cNvSpPr>
+            <a:spLocks noGrp="1"/>
+          </p:cNvSpPr>
+          <p:nvPr>
+            <p:ph type="title"/>
+          </p:nvPr>
+        </p:nvSpPr>
+        <p:spPr>
+          <a:xfrm>
+            <a:off x="457200" y="6283"/>
+            <a:ext cx="8229600" cy="659640"/>
+          </a:xfrm>
+        </p:spPr>
+        <p:txBody>
+          <a:bodyPr/>
+          <a:lstStyle/>
+          <a:p>
+            <a:r>
+              <a:rPr/>
+              <a:t>Comparison MaleMHFD_over_MaleMRD</a:t>
+            </a:r>
+          </a:p>
+        </p:txBody>
+      </p:sp>
+      <p:sp>
+        <p:nvSpPr>
+          <p:cNvPr id="3" name="Text Placeholder 4"/>
+          <p:cNvSpPr>
+            <a:spLocks noGrp="1"/>
+          </p:cNvSpPr>
+          <p:nvPr>
+            <p:ph type="body" sz="quarter" idx="3"/>
+          </p:nvPr>
+        </p:nvSpPr>
+        <p:spPr>
+          <a:xfrm>
+            <a:off x="4645025" y="782905"/>
+            <a:ext cx="4041775" cy="639762"/>
+          </a:xfrm>
+        </p:spPr>
+        <p:txBody>
+          <a:bodyPr/>
+          <a:lstStyle/>
+          <a:p>
+            <a:r>
+              <a:rPr/>
+              <a:t>Differential fdr&lt;0.25</a:t>
+            </a:r>
+          </a:p>
+        </p:txBody>
+      </p:sp>
+      <p:sp>
+        <p:nvSpPr>
+          <p:cNvPr id="4" name="Text Placeholder 2"/>
+          <p:cNvSpPr>
+            <a:spLocks noGrp="1"/>
+          </p:cNvSpPr>
+          <p:nvPr>
+            <p:ph type="body" idx="1"/>
+          </p:nvPr>
+        </p:nvSpPr>
+        <p:spPr>
+          <a:xfrm>
+            <a:off x="457200" y="776118"/>
+            <a:ext cx="4040188" cy="639762"/>
+          </a:xfrm>
+        </p:spPr>
+        <p:txBody>
+          <a:bodyPr/>
+          <a:lstStyle/>
+          <a:p>
+            <a:r>
+              <a:rPr/>
+              <a:t>Complete Set fdr=1</a:t>
+            </a:r>
+          </a:p>
+        </p:txBody>
+      </p:sp>
+      <p:pic>
+        <p:nvPicPr>
+          <p:cNvPr id="5" name="" descr=""/>
+          <p:cNvPicPr>
+            <a:picLocks noGrp="1"/>
+          </p:cNvPicPr>
+          <p:nvPr>
+            <p:ph/>
+          </p:nvPr>
+        </p:nvPicPr>
+        <p:blipFill>
+          <a:blip cstate="print" r:embed="rId2"/>
+          <a:stretch>
+            <a:fillRect/>
+          </a:stretch>
+        </p:blipFill>
+        <p:spPr>
+          <a:xfrm>
+            <a:off x="4645152" y="1426464"/>
+            <a:ext cx="4114800" cy="5440680"/>
+          </a:xfrm>
+          <a:prstGeom prst="rect">
+            <a:avLst/>
+          </a:prstGeom>
+        </p:spPr>
+      </p:pic>
+      <p:pic>
+        <p:nvPicPr>
+          <p:cNvPr id="6" name="" descr=""/>
+          <p:cNvPicPr>
+            <a:picLocks noGrp="1"/>
+          </p:cNvPicPr>
+          <p:nvPr>
+            <p:ph/>
+          </p:nvPr>
+        </p:nvPicPr>
+        <p:blipFill>
+          <a:blip cstate="print" r:embed="rId3"/>
+          <a:stretch>
+            <a:fillRect/>
+          </a:stretch>
+        </p:blipFill>
+        <p:spPr>
+          <a:xfrm>
+            <a:off x="457200" y="1426464"/>
+            <a:ext cx="4114800" cy="5440680"/>
+          </a:xfrm>
+          <a:prstGeom prst="rect">
+            <a:avLst/>
+          </a:prstGeom>
+        </p:spPr>
+      </p:pic>
+    </p:spTree>
+  </p:cSld>
+  <p:clrMapOvr>
+    <a:masterClrMapping/>
+  </p:clrMapOvr>
+</p:sld>
+</file>
+
+<file path=ppt/slides/slide14.xml><?xml version="1.0" encoding="utf-8"?>
+<p:sld xmlns:a="http://schemas.openxmlformats.org/drawingml/2006/main" xmlns:r="http://schemas.openxmlformats.org/officeDocument/2006/relationships" xmlns:p="http://schemas.openxmlformats.org/presentationml/2006/main">
+  <p:cSld>
+    <p:spTree>
+      <p:nvGrpSpPr>
+        <p:cNvPr id="1" name=""/>
+        <p:cNvGrpSpPr/>
+        <p:nvPr/>
+      </p:nvGrpSpPr>
+      <p:grpSpPr>
+        <a:xfrm>
+          <a:off x="0" y="0"/>
+          <a:ext cx="0" cy="0"/>
+          <a:chOff x="0" y="0"/>
+          <a:chExt cx="0" cy="0"/>
+        </a:xfrm>
+      </p:grpSpPr>
+      <p:sp>
+        <p:nvSpPr>
+          <p:cNvPr id="2" name="Title 1"/>
+          <p:cNvSpPr>
+            <a:spLocks noGrp="1"/>
+          </p:cNvSpPr>
+          <p:nvPr>
+            <p:ph type="title"/>
+          </p:nvPr>
+        </p:nvSpPr>
+        <p:spPr>
+          <a:xfrm>
+            <a:off x="457200" y="6283"/>
+            <a:ext cx="8229600" cy="659640"/>
+          </a:xfrm>
+        </p:spPr>
+        <p:txBody>
+          <a:bodyPr/>
+          <a:lstStyle/>
+          <a:p>
+            <a:r>
+              <a:rPr/>
+              <a:t>Comparison FemMHFD_over_FemMRD</a:t>
+            </a:r>
+          </a:p>
+        </p:txBody>
+      </p:sp>
+      <p:sp>
+        <p:nvSpPr>
+          <p:cNvPr id="3" name="Text Placeholder 4"/>
+          <p:cNvSpPr>
+            <a:spLocks noGrp="1"/>
+          </p:cNvSpPr>
+          <p:nvPr>
+            <p:ph type="body" sz="quarter" idx="3"/>
+          </p:nvPr>
+        </p:nvSpPr>
+        <p:spPr>
+          <a:xfrm>
+            <a:off x="4645025" y="782905"/>
+            <a:ext cx="4041775" cy="639762"/>
+          </a:xfrm>
+        </p:spPr>
+        <p:txBody>
+          <a:bodyPr/>
+          <a:lstStyle/>
+          <a:p>
+            <a:r>
+              <a:rPr/>
+              <a:t>Differential fdr&lt;0.25</a:t>
+            </a:r>
+          </a:p>
+        </p:txBody>
+      </p:sp>
+      <p:sp>
+        <p:nvSpPr>
+          <p:cNvPr id="4" name="Text Placeholder 2"/>
+          <p:cNvSpPr>
+            <a:spLocks noGrp="1"/>
+          </p:cNvSpPr>
+          <p:nvPr>
+            <p:ph type="body" idx="1"/>
+          </p:nvPr>
+        </p:nvSpPr>
+        <p:spPr>
+          <a:xfrm>
+            <a:off x="457200" y="776118"/>
+            <a:ext cx="4040188" cy="639762"/>
+          </a:xfrm>
+        </p:spPr>
+        <p:txBody>
+          <a:bodyPr/>
+          <a:lstStyle/>
+          <a:p>
+            <a:r>
+              <a:rPr/>
+              <a:t>Complete Set fdr=1</a:t>
+            </a:r>
+          </a:p>
+        </p:txBody>
+      </p:sp>
+      <p:pic>
+        <p:nvPicPr>
+          <p:cNvPr id="5" name="" descr=""/>
+          <p:cNvPicPr>
+            <a:picLocks noGrp="1"/>
+          </p:cNvPicPr>
+          <p:nvPr>
+            <p:ph/>
+          </p:nvPr>
+        </p:nvPicPr>
+        <p:blipFill>
+          <a:blip cstate="print" r:embed="rId2"/>
+          <a:stretch>
+            <a:fillRect/>
+          </a:stretch>
+        </p:blipFill>
+        <p:spPr>
+          <a:xfrm>
+            <a:off x="457200" y="1426464"/>
+            <a:ext cx="4114800" cy="5440680"/>
+          </a:xfrm>
+          <a:prstGeom prst="rect">
+            <a:avLst/>
+          </a:prstGeom>
+        </p:spPr>
+      </p:pic>
+    </p:spTree>
+  </p:cSld>
+  <p:clrMapOvr>
+    <a:masterClrMapping/>
+  </p:clrMapOvr>
+</p:sld>
+</file>
+
+<file path=ppt/slides/slide15.xml><?xml version="1.0" encoding="utf-8"?>
+<p:sld xmlns:a="http://schemas.openxmlformats.org/drawingml/2006/main" xmlns:r="http://schemas.openxmlformats.org/officeDocument/2006/relationships" xmlns:p="http://schemas.openxmlformats.org/presentationml/2006/main">
+  <p:cSld>
+    <p:spTree>
+      <p:nvGrpSpPr>
+        <p:cNvPr id="1" name=""/>
+        <p:cNvGrpSpPr/>
+        <p:nvPr/>
+      </p:nvGrpSpPr>
+      <p:grpSpPr>
+        <a:xfrm>
+          <a:off x="0" y="0"/>
+          <a:ext cx="0" cy="0"/>
+          <a:chOff x="0" y="0"/>
+          <a:chExt cx="0" cy="0"/>
+        </a:xfrm>
+      </p:grpSpPr>
+      <p:sp>
+        <p:nvSpPr>
+          <p:cNvPr id="2" name="Title 1"/>
+          <p:cNvSpPr>
+            <a:spLocks noGrp="1"/>
+          </p:cNvSpPr>
+          <p:nvPr>
+            <p:ph type="title"/>
+          </p:nvPr>
+        </p:nvSpPr>
+        <p:spPr>
+          <a:xfrm>
+            <a:off x="457200" y="6283"/>
+            <a:ext cx="8229600" cy="659640"/>
+          </a:xfrm>
+        </p:spPr>
+        <p:txBody>
+          <a:bodyPr/>
+          <a:lstStyle/>
+          <a:p>
+            <a:r>
+              <a:rPr/>
               <a:t>Comparison RDDam_HFDDam_MaleMRD_MaleMHFD_FemMRD_FemMHFD</a:t>
             </a:r>
           </a:p>
@@ -2405,7 +2722,7 @@
             <a:pPr lvl="1"/>
             <a:r>
               <a:rPr/>
-              <a:t>t-test</a:t>
+              <a:t>t-test (2 tailed, assuming unequal variance)</a:t>
             </a:r>
           </a:p>
           <a:p>
@@ -2433,7 +2750,7 @@
             <a:pPr lvl="1"/>
             <a:r>
               <a:rPr/>
-              <a:t>anova</a:t>
+              <a:t>anova (analysis of variance)</a:t>
             </a:r>
           </a:p>
           <a:p>
@@ -2675,7 +2992,7 @@
           <a:p>
             <a:r>
               <a:rPr/>
-              <a:t>Normalized PCA</a:t>
+              <a:t>Prenormalized PCA</a:t>
             </a:r>
           </a:p>
         </p:txBody>
@@ -2702,7 +3019,7 @@
           <a:p>
             <a:r>
               <a:rPr/>
-              <a:t>Raw PCA</a:t>
+              <a:t>Prenormalized PCA</a:t>
             </a:r>
           </a:p>
         </p:txBody>
@@ -2833,7 +3150,7 @@
           <a:p>
             <a:r>
               <a:rPr/>
-              <a:t>Normalized PCA</a:t>
+              <a:t>Prenormalized PCA</a:t>
             </a:r>
           </a:p>
         </p:txBody>
@@ -2860,7 +3177,7 @@
           <a:p>
             <a:r>
               <a:rPr/>
-              <a:t>Raw PCA</a:t>
+              <a:t>Prenormalized PCA</a:t>
             </a:r>
           </a:p>
         </p:txBody>
@@ -2991,7 +3308,7 @@
           <a:p>
             <a:r>
               <a:rPr/>
-              <a:t>Normalized PCA</a:t>
+              <a:t>Prenormalized PCA</a:t>
             </a:r>
           </a:p>
         </p:txBody>
@@ -3018,7 +3335,7 @@
           <a:p>
             <a:r>
               <a:rPr/>
-              <a:t>Raw PCA</a:t>
+              <a:t>Prenormalized PCA</a:t>
             </a:r>
           </a:p>
         </p:txBody>
@@ -3149,7 +3466,7 @@
           <a:p>
             <a:r>
               <a:rPr/>
-              <a:t>Normalized PCA</a:t>
+              <a:t>Prenormalized PCA</a:t>
             </a:r>
           </a:p>
         </p:txBody>
@@ -3176,7 +3493,7 @@
           <a:p>
             <a:r>
               <a:rPr/>
-              <a:t>Raw PCA</a:t>
+              <a:t>Prenormalized PCA</a:t>
             </a:r>
           </a:p>
         </p:txBody>
@@ -3285,63 +3602,9 @@
           </a:p>
         </p:txBody>
       </p:sp>
-      <p:sp>
-        <p:nvSpPr>
-          <p:cNvPr id="3" name="Text Placeholder 4"/>
-          <p:cNvSpPr>
-            <a:spLocks noGrp="1"/>
-          </p:cNvSpPr>
-          <p:nvPr>
-            <p:ph type="body" sz="quarter" idx="3"/>
-          </p:nvPr>
-        </p:nvSpPr>
-        <p:spPr>
-          <a:xfrm>
-            <a:off x="4645025" y="782905"/>
-            <a:ext cx="4041775" cy="639762"/>
-          </a:xfrm>
-        </p:spPr>
-        <p:txBody>
-          <a:bodyPr/>
-          <a:lstStyle/>
-          <a:p>
-            <a:r>
-              <a:rPr/>
-              <a:t>Differential fdr&lt;0.25</a:t>
-            </a:r>
-          </a:p>
-        </p:txBody>
-      </p:sp>
-      <p:sp>
-        <p:nvSpPr>
-          <p:cNvPr id="4" name="Text Placeholder 2"/>
-          <p:cNvSpPr>
-            <a:spLocks noGrp="1"/>
-          </p:cNvSpPr>
-          <p:nvPr>
-            <p:ph type="body" idx="1"/>
-          </p:nvPr>
-        </p:nvSpPr>
-        <p:spPr>
-          <a:xfrm>
-            <a:off x="457200" y="776118"/>
-            <a:ext cx="4040188" cy="639762"/>
-          </a:xfrm>
-        </p:spPr>
-        <p:txBody>
-          <a:bodyPr/>
-          <a:lstStyle/>
-          <a:p>
-            <a:r>
-              <a:rPr/>
-              <a:t>Complete Set fdr=1</a:t>
-            </a:r>
-          </a:p>
-        </p:txBody>
-      </p:sp>
       <p:pic>
         <p:nvPicPr>
-          <p:cNvPr id="5" name="" descr=""/>
+          <p:cNvPr id="3" name="" descr=""/>
           <p:cNvPicPr>
             <a:picLocks noGrp="1"/>
           </p:cNvPicPr>
@@ -3357,34 +3620,8 @@
         </p:blipFill>
         <p:spPr>
           <a:xfrm>
-            <a:off x="4645152" y="1426464"/>
-            <a:ext cx="4114800" cy="5440680"/>
-          </a:xfrm>
-          <a:prstGeom prst="rect">
-            <a:avLst/>
-          </a:prstGeom>
-        </p:spPr>
-      </p:pic>
-      <p:pic>
-        <p:nvPicPr>
-          <p:cNvPr id="6" name="" descr=""/>
-          <p:cNvPicPr>
-            <a:picLocks noGrp="1"/>
-          </p:cNvPicPr>
-          <p:nvPr>
-            <p:ph/>
-          </p:nvPr>
-        </p:nvPicPr>
-        <p:blipFill>
-          <a:blip cstate="print" r:embed="rId3"/>
-          <a:stretch>
-            <a:fillRect/>
-          </a:stretch>
-        </p:blipFill>
-        <p:spPr>
-          <a:xfrm>
-            <a:off x="457200" y="1426464"/>
-            <a:ext cx="4114800" cy="5440680"/>
+            <a:off x="457200" y="914400"/>
+            <a:ext cx="4572000" cy="4572000"/>
           </a:xfrm>
           <a:prstGeom prst="rect">
             <a:avLst/>
